--- a/set/2026-07-19 El Camino Baptist Church-CH.pptx
+++ b/set/2026-07-19 El Camino Baptist Church-CH.pptx
@@ -47,8 +47,7 @@
     <p:sldId id="321" r:id="rId41"/>
     <p:sldId id="322" r:id="rId42"/>
     <p:sldId id="323" r:id="rId43"/>
-    <p:sldId id="324" r:id="rId44"/>
-    <p:sldId id="325" r:id="rId45"/>
+    <p:sldId id="325" r:id="rId44"/>
   </p:sldIdLst>
   <p:sldSz cx="12192000" cy="6858000"/>
   <p:notesSz cx="6858000" cy="9144000"/>
@@ -500,7 +499,7 @@
           <a:p>
             <a:fld id="{E759A0DE-F190-5444-87AC-4719D5F20D15}" type="datetimeFigureOut">
               <a:rPr lang="en-US" smtClean="0"/>
-              <a:t>7/18/26</a:t>
+              <a:t>7/19/26</a:t>
             </a:fld>
             <a:endParaRPr lang="en-US"/>
           </a:p>
@@ -708,7 +707,7 @@
           <a:p>
             <a:fld id="{E759A0DE-F190-5444-87AC-4719D5F20D15}" type="datetimeFigureOut">
               <a:rPr lang="en-US" smtClean="0"/>
-              <a:t>7/18/26</a:t>
+              <a:t>7/19/26</a:t>
             </a:fld>
             <a:endParaRPr lang="en-US"/>
           </a:p>
@@ -906,7 +905,7 @@
           <a:p>
             <a:fld id="{E759A0DE-F190-5444-87AC-4719D5F20D15}" type="datetimeFigureOut">
               <a:rPr lang="en-US" smtClean="0"/>
-              <a:t>7/18/26</a:t>
+              <a:t>7/19/26</a:t>
             </a:fld>
             <a:endParaRPr lang="en-US"/>
           </a:p>
@@ -1181,7 +1180,7 @@
           <a:p>
             <a:fld id="{E759A0DE-F190-5444-87AC-4719D5F20D15}" type="datetimeFigureOut">
               <a:rPr lang="en-US" smtClean="0"/>
-              <a:t>7/18/26</a:t>
+              <a:t>7/19/26</a:t>
             </a:fld>
             <a:endParaRPr lang="en-US"/>
           </a:p>
@@ -1446,7 +1445,7 @@
           <a:p>
             <a:fld id="{E759A0DE-F190-5444-87AC-4719D5F20D15}" type="datetimeFigureOut">
               <a:rPr lang="en-US" smtClean="0"/>
-              <a:t>7/18/26</a:t>
+              <a:t>7/19/26</a:t>
             </a:fld>
             <a:endParaRPr lang="en-US"/>
           </a:p>
@@ -1858,7 +1857,7 @@
           <a:p>
             <a:fld id="{E759A0DE-F190-5444-87AC-4719D5F20D15}" type="datetimeFigureOut">
               <a:rPr lang="en-US" smtClean="0"/>
-              <a:t>7/18/26</a:t>
+              <a:t>7/19/26</a:t>
             </a:fld>
             <a:endParaRPr lang="en-US"/>
           </a:p>
@@ -1999,7 +1998,7 @@
           <a:p>
             <a:fld id="{E759A0DE-F190-5444-87AC-4719D5F20D15}" type="datetimeFigureOut">
               <a:rPr lang="en-US" smtClean="0"/>
-              <a:t>7/18/26</a:t>
+              <a:t>7/19/26</a:t>
             </a:fld>
             <a:endParaRPr lang="en-US"/>
           </a:p>
@@ -2112,7 +2111,7 @@
           <a:p>
             <a:fld id="{E759A0DE-F190-5444-87AC-4719D5F20D15}" type="datetimeFigureOut">
               <a:rPr lang="en-US" smtClean="0"/>
-              <a:t>7/18/26</a:t>
+              <a:t>7/19/26</a:t>
             </a:fld>
             <a:endParaRPr lang="en-US"/>
           </a:p>
@@ -2423,7 +2422,7 @@
           <a:p>
             <a:fld id="{E759A0DE-F190-5444-87AC-4719D5F20D15}" type="datetimeFigureOut">
               <a:rPr lang="en-US" smtClean="0"/>
-              <a:t>7/18/26</a:t>
+              <a:t>7/19/26</a:t>
             </a:fld>
             <a:endParaRPr lang="en-US"/>
           </a:p>
@@ -2711,7 +2710,7 @@
           <a:p>
             <a:fld id="{E759A0DE-F190-5444-87AC-4719D5F20D15}" type="datetimeFigureOut">
               <a:rPr lang="en-US" smtClean="0"/>
-              <a:t>7/18/26</a:t>
+              <a:t>7/19/26</a:t>
             </a:fld>
             <a:endParaRPr lang="en-US"/>
           </a:p>
@@ -9438,6 +9437,36 @@
           <a:lstStyle/>
           <a:p>
             <a:pPr algn="l"/>
+            <a:r>
+              <a:rPr lang="en-US" sz="3600" dirty="0">
+                <a:solidFill>
+                  <a:srgbClr val="FFFF00"/>
+                </a:solidFill>
+                <a:latin typeface="Avenir Medium" panose="02000503020000020003" pitchFamily="2" charset="0"/>
+                <a:ea typeface="Bodoni Ornaments" pitchFamily="2" charset="0"/>
+              </a:rPr>
+              <a:t>CAPO 2</a:t>
+            </a:r>
+            <a:r>
+              <a:rPr lang="en-US" sz="3600" baseline="30000" dirty="0">
+                <a:solidFill>
+                  <a:srgbClr val="FFFF00"/>
+                </a:solidFill>
+                <a:latin typeface="Avenir Medium" panose="02000503020000020003" pitchFamily="2" charset="0"/>
+                <a:ea typeface="Bodoni Ornaments" pitchFamily="2" charset="0"/>
+              </a:rPr>
+              <a:t>nd</a:t>
+            </a:r>
+            <a:endParaRPr lang="en-US" sz="3600" dirty="0">
+              <a:solidFill>
+                <a:srgbClr val="FFFF00"/>
+              </a:solidFill>
+              <a:latin typeface="Avenir Medium" panose="02000503020000020003" pitchFamily="2" charset="0"/>
+              <a:ea typeface="Bodoni Ornaments" pitchFamily="2" charset="0"/>
+            </a:endParaRPr>
+          </a:p>
+          <a:p>
+            <a:pPr algn="l"/>
             <a:endParaRPr lang="en-US" sz="3600" dirty="0">
               <a:solidFill>
                 <a:srgbClr val="FFFF00"/>
@@ -12697,270 +12726,6 @@
     <p:bg>
       <p:bgPr>
         <a:solidFill>
-          <a:schemeClr val="tx1"/>
-        </a:solidFill>
-        <a:effectLst/>
-      </p:bgPr>
-    </p:bg>
-    <p:spTree>
-      <p:nvGrpSpPr>
-        <p:cNvPr id="1" name="">
-          <a:extLst>
-            <a:ext uri="{FF2B5EF4-FFF2-40B4-BE49-F238E27FC236}">
-              <a16:creationId xmlns:a16="http://schemas.microsoft.com/office/drawing/2014/main" id="{654AB838-284C-101E-2C70-2FAF7A95980F}"/>
-            </a:ext>
-          </a:extLst>
-        </p:cNvPr>
-        <p:cNvGrpSpPr/>
-        <p:nvPr/>
-      </p:nvGrpSpPr>
-      <p:grpSpPr>
-        <a:xfrm>
-          <a:off x="0" y="0"/>
-          <a:ext cx="0" cy="0"/>
-          <a:chOff x="0" y="0"/>
-          <a:chExt cx="0" cy="0"/>
-        </a:xfrm>
-      </p:grpSpPr>
-      <p:sp>
-        <p:nvSpPr>
-          <p:cNvPr id="3" name="Subtitle 2">
-            <a:extLst>
-              <a:ext uri="{FF2B5EF4-FFF2-40B4-BE49-F238E27FC236}">
-                <a16:creationId xmlns:a16="http://schemas.microsoft.com/office/drawing/2014/main" id="{A5565FA0-8E5E-BBD6-898E-A62DBAA788C8}"/>
-              </a:ext>
-            </a:extLst>
-          </p:cNvPr>
-          <p:cNvSpPr>
-            <a:spLocks noGrp="1"/>
-          </p:cNvSpPr>
-          <p:nvPr>
-            <p:ph type="subTitle" idx="1"/>
-          </p:nvPr>
-        </p:nvSpPr>
-        <p:spPr>
-          <a:xfrm>
-            <a:off x="682831" y="497702"/>
-            <a:ext cx="10826338" cy="5862596"/>
-          </a:xfrm>
-        </p:spPr>
-        <p:txBody>
-          <a:bodyPr>
-            <a:noAutofit/>
-          </a:bodyPr>
-          <a:lstStyle/>
-          <a:p>
-            <a:pPr algn="l"/>
-            <a:r>
-              <a:rPr lang="en-US" sz="3200">
-                <a:solidFill>
-                  <a:schemeClr val="bg1"/>
-                </a:solidFill>
-                <a:latin typeface="Avenir Medium" panose="02000503020000020003" pitchFamily="2" charset="0"/>
-                <a:ea typeface="Bodoni Ornaments" pitchFamily="2" charset="0"/>
-              </a:rPr>
-              <a:t>    </a:t>
-            </a:r>
-            <a:r>
-              <a:rPr lang="en-US" sz="3200" dirty="0">
-                <a:solidFill>
-                  <a:schemeClr val="bg1"/>
-                </a:solidFill>
-                <a:latin typeface="Avenir Medium" panose="02000503020000020003" pitchFamily="2" charset="0"/>
-                <a:ea typeface="Bodoni Ornaments" pitchFamily="2" charset="0"/>
-              </a:rPr>
-              <a:t> </a:t>
-            </a:r>
-            <a:r>
-              <a:rPr lang="en-US" sz="3200">
-                <a:solidFill>
-                  <a:srgbClr val="FFFF00"/>
-                </a:solidFill>
-                <a:latin typeface="Avenir Medium" panose="02000503020000020003" pitchFamily="2" charset="0"/>
-                <a:ea typeface="Bodoni Ornaments" pitchFamily="2" charset="0"/>
-              </a:rPr>
-              <a:t> </a:t>
-            </a:r>
-            <a:r>
-              <a:rPr lang="en-US" sz="3200" dirty="0">
-                <a:solidFill>
-                  <a:srgbClr val="FFFF00"/>
-                </a:solidFill>
-                <a:latin typeface="Avenir Medium" panose="02000503020000020003" pitchFamily="2" charset="0"/>
-                <a:ea typeface="Bodoni Ornaments" pitchFamily="2" charset="0"/>
-              </a:rPr>
-              <a:t>C                              </a:t>
-            </a:r>
-            <a:r>
-              <a:rPr lang="en-US" sz="3200" dirty="0" err="1">
-                <a:solidFill>
-                  <a:srgbClr val="FFFF00"/>
-                </a:solidFill>
-                <a:latin typeface="Avenir Medium" panose="02000503020000020003" pitchFamily="2" charset="0"/>
-                <a:ea typeface="Bodoni Ornaments" pitchFamily="2" charset="0"/>
-              </a:rPr>
-              <a:t>Csus</a:t>
-            </a:r>
-            <a:r>
-              <a:rPr lang="en-US" sz="3200" dirty="0">
-                <a:solidFill>
-                  <a:srgbClr val="FFFF00"/>
-                </a:solidFill>
-                <a:latin typeface="Avenir Medium" panose="02000503020000020003" pitchFamily="2" charset="0"/>
-                <a:ea typeface="Bodoni Ornaments" pitchFamily="2" charset="0"/>
-              </a:rPr>
-              <a:t>         </a:t>
-            </a:r>
-          </a:p>
-          <a:p>
-            <a:pPr algn="l"/>
-            <a:r>
-              <a:rPr lang="en-US" sz="3200" dirty="0">
-                <a:solidFill>
-                  <a:schemeClr val="bg1"/>
-                </a:solidFill>
-                <a:latin typeface="Avenir Medium" panose="02000503020000020003" pitchFamily="2" charset="0"/>
-                <a:ea typeface="Bodoni Ornaments" pitchFamily="2" charset="0"/>
-              </a:rPr>
-              <a:t>Oh praise the one who paid my debt</a:t>
-            </a:r>
-          </a:p>
-          <a:p>
-            <a:pPr algn="l"/>
-            <a:r>
-              <a:rPr lang="en-US" sz="3200" dirty="0">
-                <a:solidFill>
-                  <a:srgbClr val="FFFF00"/>
-                </a:solidFill>
-                <a:latin typeface="Avenir Medium" panose="02000503020000020003" pitchFamily="2" charset="0"/>
-                <a:ea typeface="Bodoni Ornaments" pitchFamily="2" charset="0"/>
-              </a:rPr>
-              <a:t>       C                          </a:t>
-            </a:r>
-            <a:r>
-              <a:rPr lang="en-US" sz="3200" dirty="0" err="1">
-                <a:solidFill>
-                  <a:srgbClr val="FFFF00"/>
-                </a:solidFill>
-                <a:latin typeface="Avenir Medium" panose="02000503020000020003" pitchFamily="2" charset="0"/>
-                <a:ea typeface="Bodoni Ornaments" pitchFamily="2" charset="0"/>
-              </a:rPr>
-              <a:t>Csus</a:t>
-            </a:r>
-            <a:endParaRPr lang="en-US" sz="3200" dirty="0">
-              <a:solidFill>
-                <a:srgbClr val="FFFF00"/>
-              </a:solidFill>
-              <a:latin typeface="Avenir Medium" panose="02000503020000020003" pitchFamily="2" charset="0"/>
-              <a:ea typeface="Bodoni Ornaments" pitchFamily="2" charset="0"/>
-            </a:endParaRPr>
-          </a:p>
-          <a:p>
-            <a:pPr algn="l"/>
-            <a:r>
-              <a:rPr lang="en-US" sz="3200" dirty="0">
-                <a:solidFill>
-                  <a:schemeClr val="bg1"/>
-                </a:solidFill>
-                <a:latin typeface="Avenir Medium" panose="02000503020000020003" pitchFamily="2" charset="0"/>
-                <a:ea typeface="Bodoni Ornaments" pitchFamily="2" charset="0"/>
-              </a:rPr>
-              <a:t>And raised this life up from the dead</a:t>
-            </a:r>
-          </a:p>
-          <a:p>
-            <a:pPr algn="l"/>
-            <a:endParaRPr lang="en-US" sz="3200" dirty="0">
-              <a:solidFill>
-                <a:schemeClr val="bg1"/>
-              </a:solidFill>
-              <a:latin typeface="Avenir Medium" panose="02000503020000020003" pitchFamily="2" charset="0"/>
-              <a:ea typeface="Bodoni Ornaments" pitchFamily="2" charset="0"/>
-            </a:endParaRPr>
-          </a:p>
-          <a:p>
-            <a:pPr algn="l"/>
-            <a:r>
-              <a:rPr lang="en-US" sz="3200" dirty="0">
-                <a:solidFill>
-                  <a:srgbClr val="FFFF00"/>
-                </a:solidFill>
-                <a:latin typeface="Avenir Medium" panose="02000503020000020003" pitchFamily="2" charset="0"/>
-                <a:ea typeface="Bodoni Ornaments" pitchFamily="2" charset="0"/>
-              </a:rPr>
-              <a:t>      C                              F         </a:t>
-            </a:r>
-          </a:p>
-          <a:p>
-            <a:pPr algn="l"/>
-            <a:r>
-              <a:rPr lang="en-US" sz="3200" dirty="0">
-                <a:solidFill>
-                  <a:schemeClr val="bg1"/>
-                </a:solidFill>
-                <a:latin typeface="Avenir Medium" panose="02000503020000020003" pitchFamily="2" charset="0"/>
-                <a:ea typeface="Bodoni Ornaments" pitchFamily="2" charset="0"/>
-              </a:rPr>
-              <a:t>Oh praise the one who paid my debt</a:t>
-            </a:r>
-          </a:p>
-          <a:p>
-            <a:pPr algn="l"/>
-            <a:r>
-              <a:rPr lang="en-US" sz="3200" dirty="0">
-                <a:solidFill>
-                  <a:srgbClr val="FFFF00"/>
-                </a:solidFill>
-                <a:latin typeface="Avenir Medium" panose="02000503020000020003" pitchFamily="2" charset="0"/>
-                <a:ea typeface="Bodoni Ornaments" pitchFamily="2" charset="0"/>
-              </a:rPr>
-              <a:t>       Dm                          F</a:t>
-            </a:r>
-          </a:p>
-          <a:p>
-            <a:pPr algn="l"/>
-            <a:r>
-              <a:rPr lang="en-US" sz="3200" dirty="0">
-                <a:solidFill>
-                  <a:schemeClr val="bg1"/>
-                </a:solidFill>
-                <a:latin typeface="Avenir Medium" panose="02000503020000020003" pitchFamily="2" charset="0"/>
-                <a:ea typeface="Bodoni Ornaments" pitchFamily="2" charset="0"/>
-              </a:rPr>
-              <a:t>And raised this life up from the dead</a:t>
-            </a:r>
-          </a:p>
-          <a:p>
-            <a:pPr algn="l"/>
-            <a:endParaRPr lang="en-US" sz="3200" dirty="0">
-              <a:solidFill>
-                <a:schemeClr val="bg1"/>
-              </a:solidFill>
-              <a:latin typeface="Avenir Medium" panose="02000503020000020003" pitchFamily="2" charset="0"/>
-              <a:ea typeface="Bodoni Ornaments" pitchFamily="2" charset="0"/>
-            </a:endParaRPr>
-          </a:p>
-        </p:txBody>
-      </p:sp>
-    </p:spTree>
-    <p:extLst>
-      <p:ext uri="{BB962C8B-B14F-4D97-AF65-F5344CB8AC3E}">
-        <p14:creationId xmlns:p14="http://schemas.microsoft.com/office/powerpoint/2010/main" val="783589230"/>
-      </p:ext>
-    </p:extLst>
-  </p:cSld>
-  <p:clrMapOvr>
-    <a:masterClrMapping/>
-  </p:clrMapOvr>
-</p:sld>
-</file>
-
-<file path=ppt/slides/slide44.xml><?xml version="1.0" encoding="utf-8"?>
-<p:sld xmlns:a="http://schemas.openxmlformats.org/drawingml/2006/main" xmlns:r="http://schemas.openxmlformats.org/officeDocument/2006/relationships" xmlns:p="http://schemas.openxmlformats.org/presentationml/2006/main">
-  <p:cSld>
-    <p:bg>
-      <p:bgPr>
-        <a:solidFill>
           <a:schemeClr val="accent5">
             <a:lumMod val="50000"/>
           </a:schemeClr>
@@ -13117,6 +12882,48 @@
                 <a:ea typeface="Bodoni Ornaments" pitchFamily="2" charset="0"/>
               </a:rPr>
               <a:t>He washed it white as snow</a:t>
+            </a:r>
+          </a:p>
+        </p:txBody>
+      </p:sp>
+      <p:sp>
+        <p:nvSpPr>
+          <p:cNvPr id="2" name="TextBox 1">
+            <a:extLst>
+              <a:ext uri="{FF2B5EF4-FFF2-40B4-BE49-F238E27FC236}">
+                <a16:creationId xmlns:a16="http://schemas.microsoft.com/office/drawing/2014/main" id="{549C6E6F-3199-7572-9677-475F532D2858}"/>
+              </a:ext>
+            </a:extLst>
+          </p:cNvPr>
+          <p:cNvSpPr txBox="1"/>
+          <p:nvPr/>
+        </p:nvSpPr>
+        <p:spPr>
+          <a:xfrm>
+            <a:off x="9804400" y="5461000"/>
+            <a:ext cx="902811" cy="523220"/>
+          </a:xfrm>
+          <a:prstGeom prst="rect">
+            <a:avLst/>
+          </a:prstGeom>
+          <a:noFill/>
+        </p:spPr>
+        <p:txBody>
+          <a:bodyPr wrap="none" rtlCol="0">
+            <a:spAutoFit/>
+          </a:bodyPr>
+          <a:lstStyle/>
+          <a:p>
+            <a:r>
+              <a:rPr lang="en-US" sz="2800" b="1" dirty="0">
+                <a:solidFill>
+                  <a:schemeClr val="accent3">
+                    <a:lumMod val="60000"/>
+                    <a:lumOff val="40000"/>
+                  </a:schemeClr>
+                </a:solidFill>
+              </a:rPr>
+              <a:t>END</a:t>
             </a:r>
           </a:p>
         </p:txBody>
